--- a/project7/project7_presentation_charles_boudousquie_timothy_hew.pptx
+++ b/project7/project7_presentation_charles_boudousquie_timothy_hew.pptx
@@ -4156,12 +4156,49 @@
           <a:p>
             <a:r>
               <a:rPr lang="en-US" dirty="0"/>
-              <a:t>Timings are recorded to csv files and then displayed in a D3 </a:t>
-            </a:r>
-            <a:r>
-              <a:rPr lang="en-US"/>
-              <a:t>line chart.</a:t>
-            </a:r>
+              <a:t>Timings are recorded to csv files and then displayed in a D3 line chart.</a:t>
+            </a:r>
+          </a:p>
+          <a:p>
+            <a:r>
+              <a:rPr lang="en-US" dirty="0"/>
+              <a:t>Longest Tick Results:</a:t>
+            </a:r>
+          </a:p>
+          <a:p>
+            <a:r>
+              <a:rPr lang="en-US" dirty="0"/>
+              <a:t>Default engine with cubes: 33 milliseconds</a:t>
+            </a:r>
+          </a:p>
+          <a:p>
+            <a:r>
+              <a:rPr lang="en-US" dirty="0"/>
+              <a:t>Default engine with spheres: 13 milliseconds</a:t>
+            </a:r>
+          </a:p>
+          <a:p>
+            <a:r>
+              <a:rPr lang="en-US" dirty="0"/>
+              <a:t>Jolt engine with cubes: 28 milliseconds</a:t>
+            </a:r>
+          </a:p>
+          <a:p>
+            <a:r>
+              <a:rPr lang="en-US" dirty="0"/>
+              <a:t>Jolt engine with spheres: 47 milliseconds(spike occurred at beginning of simulation when loading </a:t>
+            </a:r>
+            <a:r>
+              <a:rPr lang="en-US"/>
+              <a:t>1331 spheres)!</a:t>
+            </a:r>
+            <a:endParaRPr lang="en-US" dirty="0"/>
+          </a:p>
+          <a:p>
+            <a:endParaRPr lang="en-US" dirty="0"/>
+          </a:p>
+          <a:p>
+            <a:endParaRPr lang="en-US" dirty="0"/>
           </a:p>
         </p:txBody>
       </p:sp>
